--- a/classes/parte-1-redes-y-seguridad-de-redes/042-segmentacion-de-red-y-arquitectura-zero-trust/clase-042-presentacion.pptx
+++ b/classes/parte-1-redes-y-seguridad-de-redes/042-segmentacion-de-red-y-arquitectura-zero-trust/clase-042-presentacion.pptx
@@ -17,6 +17,9 @@
     <p:sldId id="265" r:id="rId16"/>
     <p:sldId id="266" r:id="rId17"/>
     <p:sldId id="267" r:id="rId18"/>
+    <p:sldId id="268" r:id="rId19"/>
+    <p:sldId id="269" r:id="rId20"/>
+    <p:sldId id="270" r:id="rId21"/>
   </p:sldIdLst>
   <p:sldSz cx="9144000" cy="6858000" type="screen4x3"/>
   <p:notesSz cx="6858000" cy="9144000"/>
@@ -3198,7 +3201,7 @@
                   <a:srgbClr val="0B3D2E"/>
                 </a:solidFill>
               </a:rPr>
-              <a:t>⚠️ Errores comunes</a:t>
+              <a:t>✍️ Ejercicios</a:t>
             </a:r>
           </a:p>
         </p:txBody>
@@ -3236,67 +3239,82 @@
                   <a:srgbClr val="22282E"/>
                 </a:solidFill>
               </a:rPr>
-              <a:t>•  "Segmentación" que en realidad es plana — VLANs sin ACLs entre ellas; la segmentación exige control de flujo, no solo separar</a:t>
-            </a:r>
-          </a:p>
-          <a:p>
-            <a:pPr>
-              <a:spcAft>
-                <a:spcPts val="600"/>
-              </a:spcAft>
-            </a:pPr>
-            <a:r>
-              <a:rPr sz="1500">
-                <a:solidFill>
-                  <a:srgbClr val="22282E"/>
-                </a:solidFill>
-              </a:rPr>
-              <a:t>•  Zona de administración accesible desde todas partes — Falta un bastión/jump host con MFA; restringe el acceso de gestión</a:t>
-            </a:r>
-          </a:p>
-          <a:p>
-            <a:pPr>
-              <a:spcAft>
-                <a:spcPts val="600"/>
-              </a:spcAft>
-            </a:pPr>
-            <a:r>
-              <a:rPr sz="1500">
-                <a:solidFill>
-                  <a:srgbClr val="22282E"/>
-                </a:solidFill>
-              </a:rPr>
-              <a:t>•  Reglas "permitir todo" entre zonas internas — Rompe el mínimo privilegio; define flujos explícitos y deniega por defecto</a:t>
-            </a:r>
-          </a:p>
-          <a:p>
-            <a:pPr>
-              <a:spcAft>
-                <a:spcPts val="600"/>
-              </a:spcAft>
-            </a:pPr>
-            <a:r>
-              <a:rPr sz="1500">
-                <a:solidFill>
-                  <a:srgbClr val="22282E"/>
-                </a:solidFill>
-              </a:rPr>
-              <a:t>•  Zero Trust confundido con "instalar un producto" — Es una arquitectura y un conjunto de principios, no un solo producto</a:t>
-            </a:r>
-          </a:p>
-          <a:p>
-            <a:pPr>
-              <a:spcAft>
-                <a:spcPts val="600"/>
-              </a:spcAft>
-            </a:pPr>
-            <a:r>
-              <a:rPr sz="1500">
-                <a:solidFill>
-                  <a:srgbClr val="22282E"/>
-                </a:solidFill>
-              </a:rPr>
-              <a:t>•  Sin monitoreo entre segmentos — Segmentar sin observar deja puntos ciegos; integra NSM (clases 043–045)</a:t>
+              <a:t>•  Justifica por qué una base de datos nunca debe ser accesible directamente desde la red de usuarios.</a:t>
+            </a:r>
+          </a:p>
+          <a:p>
+            <a:pPr>
+              <a:spcAft>
+                <a:spcPts val="600"/>
+              </a:spcAft>
+            </a:pPr>
+            <a:r>
+              <a:rPr sz="1500">
+                <a:solidFill>
+                  <a:srgbClr val="22282E"/>
+                </a:solidFill>
+              </a:rPr>
+              <a:t>•  Diseña la ubicación de una DMZ para un servicio web con backend interno.</a:t>
+            </a:r>
+          </a:p>
+          <a:p>
+            <a:pPr>
+              <a:spcAft>
+                <a:spcPts val="600"/>
+              </a:spcAft>
+            </a:pPr>
+            <a:r>
+              <a:rPr sz="1500">
+                <a:solidFill>
+                  <a:srgbClr val="22282E"/>
+                </a:solidFill>
+              </a:rPr>
+              <a:t>•  Convierte tres flujos de tu matriz en reglas de firewall reales.</a:t>
+            </a:r>
+          </a:p>
+          <a:p>
+            <a:pPr>
+              <a:spcAft>
+                <a:spcPts val="600"/>
+              </a:spcAft>
+            </a:pPr>
+            <a:r>
+              <a:rPr sz="1500">
+                <a:solidFill>
+                  <a:srgbClr val="22282E"/>
+                </a:solidFill>
+              </a:rPr>
+              <a:t>•  Explica la diferencia entre segmentación tradicional (VLAN) y microsegmentación.</a:t>
+            </a:r>
+          </a:p>
+          <a:p>
+            <a:pPr>
+              <a:spcAft>
+                <a:spcPts val="600"/>
+              </a:spcAft>
+            </a:pPr>
+            <a:r>
+              <a:rPr sz="1500">
+                <a:solidFill>
+                  <a:srgbClr val="22282E"/>
+                </a:solidFill>
+              </a:rPr>
+              <a:t>•  Identifica qué señales de contexto usarías para decidir un acceso Zero Trust.</a:t>
+            </a:r>
+          </a:p>
+          <a:p>
+            <a:pPr>
+              <a:spcAft>
+                <a:spcPts val="600"/>
+              </a:spcAft>
+            </a:pPr>
+            <a:r>
+              <a:rPr sz="1500">
+                <a:solidFill>
+                  <a:srgbClr val="22282E"/>
+                </a:solidFill>
+              </a:rPr>
+              <a:t>•  Señala una brecha de tu diseño frente a NIST SP 800-207 y propón cómo cerrarla.</a:t>
             </a:r>
           </a:p>
         </p:txBody>
@@ -3347,7 +3365,7 @@
                   <a:srgbClr val="0B3D2E"/>
                 </a:solidFill>
               </a:rPr>
-              <a:t>❓ Preguntas frecuentes</a:t>
+              <a:t>📝 Reto verificable</a:t>
             </a:r>
           </a:p>
         </p:txBody>
@@ -3385,97 +3403,22 @@
                   <a:srgbClr val="22282E"/>
                 </a:solidFill>
               </a:rPr>
-              <a:t>•  ❓ ¿Zero Trust significa no confiar en nadie nunca?</a:t>
-            </a:r>
-          </a:p>
-          <a:p>
-            <a:pPr>
-              <a:spcAft>
-                <a:spcPts val="600"/>
-              </a:spcAft>
-            </a:pPr>
-            <a:r>
-              <a:rPr sz="1500">
-                <a:solidFill>
-                  <a:srgbClr val="22282E"/>
-                </a:solidFill>
-              </a:rPr>
-              <a:t>•  Significa no conceder confianza implícita por ubicación de red. Cada acceso se verifica con identidad, dispositivo y contexto, y se re-evalúa continuamente.</a:t>
-            </a:r>
-          </a:p>
-          <a:p>
-            <a:pPr>
-              <a:spcAft>
-                <a:spcPts val="600"/>
-              </a:spcAft>
-            </a:pPr>
-            <a:r>
-              <a:rPr sz="1500">
-                <a:solidFill>
-                  <a:srgbClr val="22282E"/>
-                </a:solidFill>
-              </a:rPr>
-              <a:t>•  ❓ ¿La segmentación sustituye al firewall perimetral?</a:t>
-            </a:r>
-          </a:p>
-          <a:p>
-            <a:pPr>
-              <a:spcAft>
-                <a:spcPts val="600"/>
-              </a:spcAft>
-            </a:pPr>
-            <a:r>
-              <a:rPr sz="1500">
-                <a:solidFill>
-                  <a:srgbClr val="22282E"/>
-                </a:solidFill>
-              </a:rPr>
-              <a:t>•  No, lo complementa. Defensa en profundidad: perímetro + segmentación interna + microsegmentación + Zero Trust.</a:t>
-            </a:r>
-          </a:p>
-          <a:p>
-            <a:pPr>
-              <a:spcAft>
-                <a:spcPts val="600"/>
-              </a:spcAft>
-            </a:pPr>
-            <a:r>
-              <a:rPr sz="1500">
-                <a:solidFill>
-                  <a:srgbClr val="22282E"/>
-                </a:solidFill>
-              </a:rPr>
-              <a:t>•  ❓ ¿Microsegmentación necesita hardware especial?</a:t>
-            </a:r>
-          </a:p>
-          <a:p>
-            <a:pPr>
-              <a:spcAft>
-                <a:spcPts val="600"/>
-              </a:spcAft>
-            </a:pPr>
-            <a:r>
-              <a:rPr sz="1500">
-                <a:solidFill>
-                  <a:srgbClr val="22282E"/>
-                </a:solidFill>
-              </a:rPr>
-              <a:t>•  No necesariamente. Puede implementarse con firewalls de host, políticas del hipervisor o mallas de servicio, además de soluciones dedicadas.</a:t>
-            </a:r>
-          </a:p>
-          <a:p>
-            <a:pPr>
-              <a:spcAft>
-                <a:spcPts val="600"/>
-              </a:spcAft>
-            </a:pPr>
-            <a:r>
-              <a:rPr sz="1500">
-                <a:solidFill>
-                  <a:srgbClr val="22282E"/>
-                </a:solidFill>
-              </a:rPr>
-              <a:t>•  ❓ ¿Por dónde empiezo a aplicar Zero Trust?</a:t>
+              <a:t>•  Diseña la arquitectura de red segmentada de una organización pequeña (al menos 5 zonas) con: diagrama, matriz de flujos permitidos de mínimo privilegio, y un mapeo explícito de dónde se aplican los…</a:t>
+            </a:r>
+          </a:p>
+          <a:p>
+            <a:pPr>
+              <a:spcAft>
+                <a:spcPts val="600"/>
+              </a:spcAft>
+            </a:pPr>
+            <a:r>
+              <a:rPr sz="1500">
+                <a:solidFill>
+                  <a:srgbClr val="22282E"/>
+                </a:solidFill>
+              </a:rPr>
+              <a:t>•  Criterio de aceptación: la matriz no contiene flujos innecesarios (mínimo privilegio verificable), el acceso a la zona de datos y de administración está estrictamente controlado, y el diseño aborda…</a:t>
             </a:r>
           </a:p>
         </p:txBody>
@@ -3526,7 +3469,7 @@
                   <a:srgbClr val="0B3D2E"/>
                 </a:solidFill>
               </a:rPr>
-              <a:t>🔗 Referencias</a:t>
+              <a:t>⚠️ Errores comunes</a:t>
             </a:r>
           </a:p>
         </p:txBody>
@@ -3564,6 +3507,334 @@
                   <a:srgbClr val="22282E"/>
                 </a:solidFill>
               </a:rPr>
+              <a:t>•  "Segmentación" que en realidad es plana — VLANs sin ACLs entre ellas; la segmentación exige control de flujo, no solo separar</a:t>
+            </a:r>
+          </a:p>
+          <a:p>
+            <a:pPr>
+              <a:spcAft>
+                <a:spcPts val="600"/>
+              </a:spcAft>
+            </a:pPr>
+            <a:r>
+              <a:rPr sz="1500">
+                <a:solidFill>
+                  <a:srgbClr val="22282E"/>
+                </a:solidFill>
+              </a:rPr>
+              <a:t>•  Zona de administración accesible desde todas partes — Falta un bastión/jump host con MFA; restringe el acceso de gestión</a:t>
+            </a:r>
+          </a:p>
+          <a:p>
+            <a:pPr>
+              <a:spcAft>
+                <a:spcPts val="600"/>
+              </a:spcAft>
+            </a:pPr>
+            <a:r>
+              <a:rPr sz="1500">
+                <a:solidFill>
+                  <a:srgbClr val="22282E"/>
+                </a:solidFill>
+              </a:rPr>
+              <a:t>•  Reglas "permitir todo" entre zonas internas — Rompe el mínimo privilegio; define flujos explícitos y deniega por defecto</a:t>
+            </a:r>
+          </a:p>
+          <a:p>
+            <a:pPr>
+              <a:spcAft>
+                <a:spcPts val="600"/>
+              </a:spcAft>
+            </a:pPr>
+            <a:r>
+              <a:rPr sz="1500">
+                <a:solidFill>
+                  <a:srgbClr val="22282E"/>
+                </a:solidFill>
+              </a:rPr>
+              <a:t>•  Zero Trust confundido con "instalar un producto" — Es una arquitectura y un conjunto de principios, no un solo producto</a:t>
+            </a:r>
+          </a:p>
+          <a:p>
+            <a:pPr>
+              <a:spcAft>
+                <a:spcPts val="600"/>
+              </a:spcAft>
+            </a:pPr>
+            <a:r>
+              <a:rPr sz="1500">
+                <a:solidFill>
+                  <a:srgbClr val="22282E"/>
+                </a:solidFill>
+              </a:rPr>
+              <a:t>•  Sin monitoreo entre segmentos — Segmentar sin observar deja puntos ciegos; integra NSM (clases 043–045)</a:t>
+            </a:r>
+          </a:p>
+        </p:txBody>
+      </p:sp>
+    </p:spTree>
+  </p:cSld>
+  <p:clrMapOvr>
+    <a:masterClrMapping/>
+  </p:clrMapOvr>
+</p:sld>
+</file>
+
+<file path=ppt/slides/slide13.xml><?xml version="1.0" encoding="utf-8"?>
+<p:sld xmlns:a="http://schemas.openxmlformats.org/drawingml/2006/main" xmlns:p="http://schemas.openxmlformats.org/presentationml/2006/main" xmlns:r="http://schemas.openxmlformats.org/officeDocument/2006/relationships">
+  <p:cSld>
+    <p:spTree>
+      <p:nvGrpSpPr>
+        <p:cNvPr id="1" name=""/>
+        <p:cNvGrpSpPr/>
+        <p:nvPr/>
+      </p:nvGrpSpPr>
+      <p:grpSpPr/>
+      <p:sp>
+        <p:nvSpPr>
+          <p:cNvPr id="2" name="TextBox 1"/>
+          <p:cNvSpPr txBox="1"/>
+          <p:nvPr/>
+        </p:nvSpPr>
+        <p:spPr>
+          <a:xfrm>
+            <a:off x="457200" y="320040"/>
+            <a:ext cx="8229600" cy="822960"/>
+          </a:xfrm>
+          <a:prstGeom prst="rect">
+            <a:avLst/>
+          </a:prstGeom>
+          <a:noFill/>
+        </p:spPr>
+        <p:txBody>
+          <a:bodyPr wrap="square">
+            <a:spAutoFit/>
+          </a:bodyPr>
+          <a:lstStyle/>
+          <a:p>
+            <a:r>
+              <a:rPr sz="2600" b="1">
+                <a:solidFill>
+                  <a:srgbClr val="0B3D2E"/>
+                </a:solidFill>
+              </a:rPr>
+              <a:t>❓ Preguntas frecuentes</a:t>
+            </a:r>
+          </a:p>
+        </p:txBody>
+      </p:sp>
+      <p:sp>
+        <p:nvSpPr>
+          <p:cNvPr id="3" name="TextBox 2"/>
+          <p:cNvSpPr txBox="1"/>
+          <p:nvPr/>
+        </p:nvSpPr>
+        <p:spPr>
+          <a:xfrm>
+            <a:off x="457200" y="1280160"/>
+            <a:ext cx="8229600" cy="4937760"/>
+          </a:xfrm>
+          <a:prstGeom prst="rect">
+            <a:avLst/>
+          </a:prstGeom>
+          <a:noFill/>
+        </p:spPr>
+        <p:txBody>
+          <a:bodyPr wrap="square">
+            <a:spAutoFit/>
+          </a:bodyPr>
+          <a:lstStyle/>
+          <a:p>
+            <a:pPr>
+              <a:spcAft>
+                <a:spcPts val="600"/>
+              </a:spcAft>
+            </a:pPr>
+            <a:r>
+              <a:rPr sz="1500">
+                <a:solidFill>
+                  <a:srgbClr val="22282E"/>
+                </a:solidFill>
+              </a:rPr>
+              <a:t>•  ❓ ¿Zero Trust significa no confiar en nadie nunca?</a:t>
+            </a:r>
+          </a:p>
+          <a:p>
+            <a:pPr>
+              <a:spcAft>
+                <a:spcPts val="600"/>
+              </a:spcAft>
+            </a:pPr>
+            <a:r>
+              <a:rPr sz="1500">
+                <a:solidFill>
+                  <a:srgbClr val="22282E"/>
+                </a:solidFill>
+              </a:rPr>
+              <a:t>•  Significa no conceder confianza implícita por ubicación de red. Cada acceso se verifica con identidad, dispositivo y contexto, y se re-evalúa continuamente.</a:t>
+            </a:r>
+          </a:p>
+          <a:p>
+            <a:pPr>
+              <a:spcAft>
+                <a:spcPts val="600"/>
+              </a:spcAft>
+            </a:pPr>
+            <a:r>
+              <a:rPr sz="1500">
+                <a:solidFill>
+                  <a:srgbClr val="22282E"/>
+                </a:solidFill>
+              </a:rPr>
+              <a:t>•  ❓ ¿La segmentación sustituye al firewall perimetral?</a:t>
+            </a:r>
+          </a:p>
+          <a:p>
+            <a:pPr>
+              <a:spcAft>
+                <a:spcPts val="600"/>
+              </a:spcAft>
+            </a:pPr>
+            <a:r>
+              <a:rPr sz="1500">
+                <a:solidFill>
+                  <a:srgbClr val="22282E"/>
+                </a:solidFill>
+              </a:rPr>
+              <a:t>•  No, lo complementa. Defensa en profundidad: perímetro + segmentación interna + microsegmentación + Zero Trust.</a:t>
+            </a:r>
+          </a:p>
+          <a:p>
+            <a:pPr>
+              <a:spcAft>
+                <a:spcPts val="600"/>
+              </a:spcAft>
+            </a:pPr>
+            <a:r>
+              <a:rPr sz="1500">
+                <a:solidFill>
+                  <a:srgbClr val="22282E"/>
+                </a:solidFill>
+              </a:rPr>
+              <a:t>•  ❓ ¿Microsegmentación necesita hardware especial?</a:t>
+            </a:r>
+          </a:p>
+          <a:p>
+            <a:pPr>
+              <a:spcAft>
+                <a:spcPts val="600"/>
+              </a:spcAft>
+            </a:pPr>
+            <a:r>
+              <a:rPr sz="1500">
+                <a:solidFill>
+                  <a:srgbClr val="22282E"/>
+                </a:solidFill>
+              </a:rPr>
+              <a:t>•  No necesariamente. Puede implementarse con firewalls de host, políticas del hipervisor o mallas de servicio, además de soluciones dedicadas.</a:t>
+            </a:r>
+          </a:p>
+          <a:p>
+            <a:pPr>
+              <a:spcAft>
+                <a:spcPts val="600"/>
+              </a:spcAft>
+            </a:pPr>
+            <a:r>
+              <a:rPr sz="1500">
+                <a:solidFill>
+                  <a:srgbClr val="22282E"/>
+                </a:solidFill>
+              </a:rPr>
+              <a:t>•  ❓ ¿Por dónde empiezo a aplicar Zero Trust?</a:t>
+            </a:r>
+          </a:p>
+        </p:txBody>
+      </p:sp>
+    </p:spTree>
+  </p:cSld>
+  <p:clrMapOvr>
+    <a:masterClrMapping/>
+  </p:clrMapOvr>
+</p:sld>
+</file>
+
+<file path=ppt/slides/slide14.xml><?xml version="1.0" encoding="utf-8"?>
+<p:sld xmlns:a="http://schemas.openxmlformats.org/drawingml/2006/main" xmlns:p="http://schemas.openxmlformats.org/presentationml/2006/main" xmlns:r="http://schemas.openxmlformats.org/officeDocument/2006/relationships">
+  <p:cSld>
+    <p:spTree>
+      <p:nvGrpSpPr>
+        <p:cNvPr id="1" name=""/>
+        <p:cNvGrpSpPr/>
+        <p:nvPr/>
+      </p:nvGrpSpPr>
+      <p:grpSpPr/>
+      <p:sp>
+        <p:nvSpPr>
+          <p:cNvPr id="2" name="TextBox 1"/>
+          <p:cNvSpPr txBox="1"/>
+          <p:nvPr/>
+        </p:nvSpPr>
+        <p:spPr>
+          <a:xfrm>
+            <a:off x="457200" y="320040"/>
+            <a:ext cx="8229600" cy="822960"/>
+          </a:xfrm>
+          <a:prstGeom prst="rect">
+            <a:avLst/>
+          </a:prstGeom>
+          <a:noFill/>
+        </p:spPr>
+        <p:txBody>
+          <a:bodyPr wrap="square">
+            <a:spAutoFit/>
+          </a:bodyPr>
+          <a:lstStyle/>
+          <a:p>
+            <a:r>
+              <a:rPr sz="2600" b="1">
+                <a:solidFill>
+                  <a:srgbClr val="0B3D2E"/>
+                </a:solidFill>
+              </a:rPr>
+              <a:t>🔗 Referencias</a:t>
+            </a:r>
+          </a:p>
+        </p:txBody>
+      </p:sp>
+      <p:sp>
+        <p:nvSpPr>
+          <p:cNvPr id="3" name="TextBox 2"/>
+          <p:cNvSpPr txBox="1"/>
+          <p:nvPr/>
+        </p:nvSpPr>
+        <p:spPr>
+          <a:xfrm>
+            <a:off x="457200" y="1280160"/>
+            <a:ext cx="8229600" cy="4937760"/>
+          </a:xfrm>
+          <a:prstGeom prst="rect">
+            <a:avLst/>
+          </a:prstGeom>
+          <a:noFill/>
+        </p:spPr>
+        <p:txBody>
+          <a:bodyPr wrap="square">
+            <a:spAutoFit/>
+          </a:bodyPr>
+          <a:lstStyle/>
+          <a:p>
+            <a:pPr>
+              <a:spcAft>
+                <a:spcPts val="600"/>
+              </a:spcAft>
+            </a:pPr>
+            <a:r>
+              <a:rPr sz="1500">
+                <a:solidFill>
+                  <a:srgbClr val="22282E"/>
+                </a:solidFill>
+              </a:rPr>
               <a:t>•  NIST SP 800-207 — Zero Trust Architecture. &lt;https://csrc.nist.gov/pubs/sp/800/207/final&gt;</a:t>
             </a:r>
           </a:p>
@@ -3614,6 +3885,81 @@
           </a:p>
         </p:txBody>
       </p:sp>
+    </p:spTree>
+  </p:cSld>
+  <p:clrMapOvr>
+    <a:masterClrMapping/>
+  </p:clrMapOvr>
+</p:sld>
+</file>
+
+<file path=ppt/slides/slide15.xml><?xml version="1.0" encoding="utf-8"?>
+<p:sld xmlns:a="http://schemas.openxmlformats.org/drawingml/2006/main" xmlns:p="http://schemas.openxmlformats.org/presentationml/2006/main" xmlns:r="http://schemas.openxmlformats.org/officeDocument/2006/relationships">
+  <p:cSld>
+    <p:spTree>
+      <p:nvGrpSpPr>
+        <p:cNvPr id="1" name=""/>
+        <p:cNvGrpSpPr/>
+        <p:nvPr/>
+      </p:nvGrpSpPr>
+      <p:grpSpPr/>
+      <p:sp>
+        <p:nvSpPr>
+          <p:cNvPr id="2" name="TextBox 1"/>
+          <p:cNvSpPr txBox="1"/>
+          <p:nvPr/>
+        </p:nvSpPr>
+        <p:spPr>
+          <a:xfrm>
+            <a:off x="457200" y="274320"/>
+            <a:ext cx="8229600" cy="640080"/>
+          </a:xfrm>
+          <a:prstGeom prst="rect">
+            <a:avLst/>
+          </a:prstGeom>
+          <a:noFill/>
+        </p:spPr>
+        <p:txBody>
+          <a:bodyPr wrap="square">
+            <a:spAutoFit/>
+          </a:bodyPr>
+          <a:lstStyle/>
+          <a:p>
+            <a:r>
+              <a:rPr sz="2200" b="1">
+                <a:solidFill>
+                  <a:srgbClr val="0B3D2E"/>
+                </a:solidFill>
+              </a:rPr>
+              <a:t>Diagrama de la clase</a:t>
+            </a:r>
+          </a:p>
+        </p:txBody>
+      </p:sp>
+      <p:pic>
+        <p:nvPicPr>
+          <p:cNvPr id="3" name="Picture 2" descr="fb79bc2d56ef6293.png"/>
+          <p:cNvPicPr>
+            <a:picLocks noChangeAspect="1"/>
+          </p:cNvPicPr>
+          <p:nvPr/>
+        </p:nvPicPr>
+        <p:blipFill>
+          <a:blip r:embed="rId2"/>
+          <a:stretch>
+            <a:fillRect/>
+          </a:stretch>
+        </p:blipFill>
+        <p:spPr>
+          <a:xfrm>
+            <a:off x="1951490" y="1097280"/>
+            <a:ext cx="5241020" cy="5303520"/>
+          </a:xfrm>
+          <a:prstGeom prst="rect">
+            <a:avLst/>
+          </a:prstGeom>
+        </p:spPr>
+      </p:pic>
     </p:spTree>
   </p:cSld>
   <p:clrMapOvr>
@@ -3698,7 +4044,7 @@
                   <a:srgbClr val="22282E"/>
                 </a:solidFill>
               </a:rPr>
-              <a:t>•  Diseñar redes que limiten el movimiento lateral de un atacante mediante segmentación (VLANs, subredes, microsegmentación) y adoptar los principios de Zero Trust: "nunca confíes, siempre verifica". El alumno aprenderá a modelar zonas, definir políticas de acceso y evaluar una arquitectura frente a NIST SP 800-207.</a:t>
+              <a:t>•  Diseñar redes que limiten el movimiento lateral de un atacante mediante segmentación (VLANs, subredes, microsegmentación) y adoptar los principios de Zero Trust: "nunca confíes, siempre verifica". El…</a:t>
             </a:r>
           </a:p>
         </p:txBody>
@@ -4107,7 +4453,7 @@
                   <a:srgbClr val="0B3D2E"/>
                 </a:solidFill>
               </a:rPr>
-              <a:t>📖 Definiciones y características</a:t>
+              <a:t>🧠 Explicación en profundidad</a:t>
             </a:r>
           </a:p>
         </p:txBody>
@@ -4145,82 +4491,97 @@
                   <a:srgbClr val="22282E"/>
                 </a:solidFill>
               </a:rPr>
-              <a:t>•  Segmentación de red: división de la red en zonas aisladas con controles entre ellas, para que comprometer una no dé acceso a las demás.</a:t>
-            </a:r>
-          </a:p>
-          <a:p>
-            <a:pPr>
-              <a:spcAft>
-                <a:spcPts val="600"/>
-              </a:spcAft>
-            </a:pPr>
-            <a:r>
-              <a:rPr sz="1500">
-                <a:solidFill>
-                  <a:srgbClr val="22282E"/>
-                </a:solidFill>
-              </a:rPr>
-              <a:t>•  DMZ: zona intermedia que aloja servicios expuestos a Internet, separada de la red interna.</a:t>
-            </a:r>
-          </a:p>
-          <a:p>
-            <a:pPr>
-              <a:spcAft>
-                <a:spcPts val="600"/>
-              </a:spcAft>
-            </a:pPr>
-            <a:r>
-              <a:rPr sz="1500">
-                <a:solidFill>
-                  <a:srgbClr val="22282E"/>
-                </a:solidFill>
-              </a:rPr>
-              <a:t>•  Microsegmentación: segmentación fina, a nivel de carga de trabajo o aplicación, normalmente aplicada por políticas en el host o en el hipervisor.</a:t>
-            </a:r>
-          </a:p>
-          <a:p>
-            <a:pPr>
-              <a:spcAft>
-                <a:spcPts val="600"/>
-              </a:spcAft>
-            </a:pPr>
-            <a:r>
-              <a:rPr sz="1500">
-                <a:solidFill>
-                  <a:srgbClr val="22282E"/>
-                </a:solidFill>
-              </a:rPr>
-              <a:t>•  Zero Trust: modelo donde no se confía en ningún actor por su ubicación en la red; cada acceso se autentica, autoriza y cifra, verificándose continuamente.</a:t>
-            </a:r>
-          </a:p>
-          <a:p>
-            <a:pPr>
-              <a:spcAft>
-                <a:spcPts val="600"/>
-              </a:spcAft>
-            </a:pPr>
-            <a:r>
-              <a:rPr sz="1500">
-                <a:solidFill>
-                  <a:srgbClr val="22282E"/>
-                </a:solidFill>
-              </a:rPr>
-              <a:t>•  PEP (Policy Enforcement Point): componente que aplica la decisión de acceso (permite/deniega el flujo).</a:t>
-            </a:r>
-          </a:p>
-          <a:p>
-            <a:pPr>
-              <a:spcAft>
-                <a:spcPts val="600"/>
-              </a:spcAft>
-            </a:pPr>
-            <a:r>
-              <a:rPr sz="1500">
-                <a:solidFill>
-                  <a:srgbClr val="22282E"/>
-                </a:solidFill>
-              </a:rPr>
-              <a:t>•  PDP (Policy Decision Point): componente que decide, según políticas, identidad, dispositivo y contexto, si se concede el acceso.</a:t>
+              <a:t>•  El modelo clásico de seguridad de red es el del perímetro: un muro fuerte —el</a:t>
+            </a:r>
+          </a:p>
+          <a:p>
+            <a:pPr>
+              <a:spcAft>
+                <a:spcPts val="600"/>
+              </a:spcAft>
+            </a:pPr>
+            <a:r>
+              <a:rPr sz="1500">
+                <a:solidFill>
+                  <a:srgbClr val="22282E"/>
+                </a:solidFill>
+              </a:rPr>
+              <a:t>•  firewall— separa el "dentro" de confianza del "fuera" hostil. Su defecto es fatal y hoy</a:t>
+            </a:r>
+          </a:p>
+          <a:p>
+            <a:pPr>
+              <a:spcAft>
+                <a:spcPts val="600"/>
+              </a:spcAft>
+            </a:pPr>
+            <a:r>
+              <a:rPr sz="1500">
+                <a:solidFill>
+                  <a:srgbClr val="22282E"/>
+                </a:solidFill>
+              </a:rPr>
+              <a:t>•  evidente: una vez que el atacante cruza el muro (con un phishing, una VPN robada, un</a:t>
+            </a:r>
+          </a:p>
+          <a:p>
+            <a:pPr>
+              <a:spcAft>
+                <a:spcPts val="600"/>
+              </a:spcAft>
+            </a:pPr>
+            <a:r>
+              <a:rPr sz="1500">
+                <a:solidFill>
+                  <a:srgbClr val="22282E"/>
+                </a:solidFill>
+              </a:rPr>
+              <a:t>•  portátil comprometido), la red interna le trata como a uno de los suyos y puede</a:t>
+            </a:r>
+          </a:p>
+          <a:p>
+            <a:pPr>
+              <a:spcAft>
+                <a:spcPts val="600"/>
+              </a:spcAft>
+            </a:pPr>
+            <a:r>
+              <a:rPr sz="1500">
+                <a:solidFill>
+                  <a:srgbClr val="22282E"/>
+                </a:solidFill>
+              </a:rPr>
+              <a:t>•  moverse lateralmente con poca resistencia. El teletrabajo, la nube y los dispositivos</a:t>
+            </a:r>
+          </a:p>
+          <a:p>
+            <a:pPr>
+              <a:spcAft>
+                <a:spcPts val="600"/>
+              </a:spcAft>
+            </a:pPr>
+            <a:r>
+              <a:rPr sz="1500">
+                <a:solidFill>
+                  <a:srgbClr val="22282E"/>
+                </a:solidFill>
+              </a:rPr>
+              <a:t>•  móviles disolvieron además la propia idea de "dentro": ya no hay un borde único que</a:t>
+            </a:r>
+          </a:p>
+          <a:p>
+            <a:pPr>
+              <a:spcAft>
+                <a:spcPts val="600"/>
+              </a:spcAft>
+            </a:pPr>
+            <a:r>
+              <a:rPr sz="1500">
+                <a:solidFill>
+                  <a:srgbClr val="22282E"/>
+                </a:solidFill>
+              </a:rPr>
+              <a:t>•  defender. La segmentación y el zero trust son las dos respuestas, complementarias, a ese</a:t>
             </a:r>
           </a:p>
         </p:txBody>
@@ -4271,7 +4632,7 @@
                   <a:srgbClr val="0B3D2E"/>
                 </a:solidFill>
               </a:rPr>
-              <a:t>🧰 Herramientas y preparación</a:t>
+              <a:t>📖 Definiciones y características</a:t>
             </a:r>
           </a:p>
         </p:txBody>
@@ -4309,52 +4670,82 @@
                   <a:srgbClr val="22282E"/>
                 </a:solidFill>
               </a:rPr>
-              <a:t>•  Herramienta de diagramado (draw.io, Excalidraw) para modelar la arquitectura.</a:t>
-            </a:r>
-          </a:p>
-          <a:p>
-            <a:pPr>
-              <a:spcAft>
-                <a:spcPts val="600"/>
-              </a:spcAft>
-            </a:pPr>
-            <a:r>
-              <a:rPr sz="1500">
-                <a:solidFill>
-                  <a:srgbClr val="22282E"/>
-                </a:solidFill>
-              </a:rPr>
-              <a:t>•  Laboratorio de red (GNS3/EVE-NG o VMs con múltiples redes) para implementar VLANs y ACLs.</a:t>
-            </a:r>
-          </a:p>
-          <a:p>
-            <a:pPr>
-              <a:spcAft>
-                <a:spcPts val="600"/>
-              </a:spcAft>
-            </a:pPr>
-            <a:r>
-              <a:rPr sz="1500">
-                <a:solidFill>
-                  <a:srgbClr val="22282E"/>
-                </a:solidFill>
-              </a:rPr>
-              <a:t>•  Firewalls de host (nftables, clase 034) para simular microsegmentación.</a:t>
-            </a:r>
-          </a:p>
-          <a:p>
-            <a:pPr>
-              <a:spcAft>
-                <a:spcPts val="600"/>
-              </a:spcAft>
-            </a:pPr>
-            <a:r>
-              <a:rPr sz="1500">
-                <a:solidFill>
-                  <a:srgbClr val="22282E"/>
-                </a:solidFill>
-              </a:rPr>
-              <a:t>•  Documento NIST SP 800-207 como referencia.</a:t>
+              <a:t>•  Segmentación de red: división de la red en zonas aisladas con controles entre ellas, para que comprometer una no dé acceso a las demás.</a:t>
+            </a:r>
+          </a:p>
+          <a:p>
+            <a:pPr>
+              <a:spcAft>
+                <a:spcPts val="600"/>
+              </a:spcAft>
+            </a:pPr>
+            <a:r>
+              <a:rPr sz="1500">
+                <a:solidFill>
+                  <a:srgbClr val="22282E"/>
+                </a:solidFill>
+              </a:rPr>
+              <a:t>•  DMZ: zona intermedia que aloja servicios expuestos a Internet, separada de la red interna.</a:t>
+            </a:r>
+          </a:p>
+          <a:p>
+            <a:pPr>
+              <a:spcAft>
+                <a:spcPts val="600"/>
+              </a:spcAft>
+            </a:pPr>
+            <a:r>
+              <a:rPr sz="1500">
+                <a:solidFill>
+                  <a:srgbClr val="22282E"/>
+                </a:solidFill>
+              </a:rPr>
+              <a:t>•  Microsegmentación: segmentación fina, a nivel de carga de trabajo o aplicación, normalmente aplicada por políticas en el host o en el hipervisor.</a:t>
+            </a:r>
+          </a:p>
+          <a:p>
+            <a:pPr>
+              <a:spcAft>
+                <a:spcPts val="600"/>
+              </a:spcAft>
+            </a:pPr>
+            <a:r>
+              <a:rPr sz="1500">
+                <a:solidFill>
+                  <a:srgbClr val="22282E"/>
+                </a:solidFill>
+              </a:rPr>
+              <a:t>•  Zero Trust: modelo donde no se confía en ningún actor por su ubicación en la red; cada acceso se autentica, autoriza y cifra, verificándose continuamente.</a:t>
+            </a:r>
+          </a:p>
+          <a:p>
+            <a:pPr>
+              <a:spcAft>
+                <a:spcPts val="600"/>
+              </a:spcAft>
+            </a:pPr>
+            <a:r>
+              <a:rPr sz="1500">
+                <a:solidFill>
+                  <a:srgbClr val="22282E"/>
+                </a:solidFill>
+              </a:rPr>
+              <a:t>•  PEP (Policy Enforcement Point): componente que aplica la decisión de acceso (permite/deniega el flujo).</a:t>
+            </a:r>
+          </a:p>
+          <a:p>
+            <a:pPr>
+              <a:spcAft>
+                <a:spcPts val="600"/>
+              </a:spcAft>
+            </a:pPr>
+            <a:r>
+              <a:rPr sz="1500">
+                <a:solidFill>
+                  <a:srgbClr val="22282E"/>
+                </a:solidFill>
+              </a:rPr>
+              <a:t>•  PDP (Policy Decision Point): componente que decide, según políticas, identidad, dispositivo y contexto, si se concede el acceso.</a:t>
             </a:r>
           </a:p>
         </p:txBody>
@@ -4405,7 +4796,7 @@
                   <a:srgbClr val="0B3D2E"/>
                 </a:solidFill>
               </a:rPr>
-              <a:t>🧪 Laboratorio guiado (ejercicio de diseño aplicado)</a:t>
+              <a:t>📔 Glosario</a:t>
             </a:r>
           </a:p>
         </p:txBody>
@@ -4443,97 +4834,97 @@
                   <a:srgbClr val="22282E"/>
                 </a:solidFill>
               </a:rPr>
-              <a:t>•  Inventaria activos de una organización ficticia: servidores web, base de datos, estaciones de trabajo, servidores de gestión, IoT/impresoras, servicios expuestos.</a:t>
-            </a:r>
-          </a:p>
-          <a:p>
-            <a:pPr>
-              <a:spcAft>
-                <a:spcPts val="600"/>
-              </a:spcAft>
-            </a:pPr>
-            <a:r>
-              <a:rPr sz="1500">
-                <a:solidFill>
-                  <a:srgbClr val="22282E"/>
-                </a:solidFill>
-              </a:rPr>
-              <a:t>•  Clasifica por sensibilidad y agrupa en zonas: DMZ (web), zona de aplicaciones, zona de datos, zona de administración, zona de usuarios, zona de dispositivos no confiables.</a:t>
-            </a:r>
-          </a:p>
-          <a:p>
-            <a:pPr>
-              <a:spcAft>
-                <a:spcPts val="600"/>
-              </a:spcAft>
-            </a:pPr>
-            <a:r>
-              <a:rPr sz="1500">
-                <a:solidFill>
-                  <a:srgbClr val="22282E"/>
-                </a:solidFill>
-              </a:rPr>
-              <a:t>•  Dibuja el diagrama con las zonas y los puntos de control (firewalls) entre ellas.</a:t>
-            </a:r>
-          </a:p>
-          <a:p>
-            <a:pPr>
-              <a:spcAft>
-                <a:spcPts val="600"/>
-              </a:spcAft>
-            </a:pPr>
-            <a:r>
-              <a:rPr sz="1500">
-                <a:solidFill>
-                  <a:srgbClr val="22282E"/>
-                </a:solidFill>
-              </a:rPr>
-              <a:t>•  Define la matriz de flujos permitidos (tabla origen→destino:puerto), aplicando mínimo privilegio. Ejemplo:</a:t>
-            </a:r>
-          </a:p>
-          <a:p>
-            <a:pPr>
-              <a:spcAft>
-                <a:spcPts val="600"/>
-              </a:spcAft>
-            </a:pPr>
-            <a:r>
-              <a:rPr sz="1500">
-                <a:solidFill>
-                  <a:srgbClr val="22282E"/>
-                </a:solidFill>
-              </a:rPr>
-              <a:t>•  Origen — Destino</a:t>
-            </a:r>
-          </a:p>
-          <a:p>
-            <a:pPr>
-              <a:spcAft>
-                <a:spcPts val="600"/>
-              </a:spcAft>
-            </a:pPr>
-            <a:r>
-              <a:rPr sz="1500">
-                <a:solidFill>
-                  <a:srgbClr val="22282E"/>
-                </a:solidFill>
-              </a:rPr>
-              <a:t>•  Usuarios — Web (DMZ)</a:t>
-            </a:r>
-          </a:p>
-          <a:p>
-            <a:pPr>
-              <a:spcAft>
-                <a:spcPts val="600"/>
-              </a:spcAft>
-            </a:pPr>
-            <a:r>
-              <a:rPr sz="1500">
-                <a:solidFill>
-                  <a:srgbClr val="22282E"/>
-                </a:solidFill>
-              </a:rPr>
-              <a:t>•  Web (DMZ) — App</a:t>
+              <a:t>•  Término — Definición concisa</a:t>
+            </a:r>
+          </a:p>
+          <a:p>
+            <a:pPr>
+              <a:spcAft>
+                <a:spcPts val="600"/>
+              </a:spcAft>
+            </a:pPr>
+            <a:r>
+              <a:rPr sz="1500">
+                <a:solidFill>
+                  <a:srgbClr val="22282E"/>
+                </a:solidFill>
+              </a:rPr>
+              <a:t>•  Perímetro — Modelo que confía en todo lo que está "dentro" del firewall</a:t>
+            </a:r>
+          </a:p>
+          <a:p>
+            <a:pPr>
+              <a:spcAft>
+                <a:spcPts val="600"/>
+              </a:spcAft>
+            </a:pPr>
+            <a:r>
+              <a:rPr sz="1500">
+                <a:solidFill>
+                  <a:srgbClr val="22282E"/>
+                </a:solidFill>
+              </a:rPr>
+              <a:t>•  Movimiento lateral — Avance del atacante entre equipos internos tras la brecha</a:t>
+            </a:r>
+          </a:p>
+          <a:p>
+            <a:pPr>
+              <a:spcAft>
+                <a:spcPts val="600"/>
+              </a:spcAft>
+            </a:pPr>
+            <a:r>
+              <a:rPr sz="1500">
+                <a:solidFill>
+                  <a:srgbClr val="22282E"/>
+                </a:solidFill>
+              </a:rPr>
+              <a:t>•  Segmentación — Dividir la red en zonas y controlar el tráfico entre ellas</a:t>
+            </a:r>
+          </a:p>
+          <a:p>
+            <a:pPr>
+              <a:spcAft>
+                <a:spcPts val="600"/>
+              </a:spcAft>
+            </a:pPr>
+            <a:r>
+              <a:rPr sz="1500">
+                <a:solidFill>
+                  <a:srgbClr val="22282E"/>
+                </a:solidFill>
+              </a:rPr>
+              <a:t>•  VLAN / subred — Separación de la red en grandes bloques lógicos</a:t>
+            </a:r>
+          </a:p>
+          <a:p>
+            <a:pPr>
+              <a:spcAft>
+                <a:spcPts val="600"/>
+              </a:spcAft>
+            </a:pPr>
+            <a:r>
+              <a:rPr sz="1500">
+                <a:solidFill>
+                  <a:srgbClr val="22282E"/>
+                </a:solidFill>
+              </a:rPr>
+              <a:t>•  DMZ — Zona aislada para los servicios expuestos a Internet</a:t>
+            </a:r>
+          </a:p>
+          <a:p>
+            <a:pPr>
+              <a:spcAft>
+                <a:spcPts val="600"/>
+              </a:spcAft>
+            </a:pPr>
+            <a:r>
+              <a:rPr sz="1500">
+                <a:solidFill>
+                  <a:srgbClr val="22282E"/>
+                </a:solidFill>
+              </a:rPr>
+              <a:t>•  Microsegmentación — Políticas por carga de trabajo individual</a:t>
             </a:r>
           </a:p>
         </p:txBody>
@@ -4584,7 +4975,7 @@
                   <a:srgbClr val="0B3D2E"/>
                 </a:solidFill>
               </a:rPr>
-              <a:t>✍️ Ejercicios</a:t>
+              <a:t>🧰 Herramientas y preparación</a:t>
             </a:r>
           </a:p>
         </p:txBody>
@@ -4622,82 +5013,52 @@
                   <a:srgbClr val="22282E"/>
                 </a:solidFill>
               </a:rPr>
-              <a:t>•  Justifica por qué una base de datos nunca debe ser accesible directamente desde la red de usuarios.</a:t>
-            </a:r>
-          </a:p>
-          <a:p>
-            <a:pPr>
-              <a:spcAft>
-                <a:spcPts val="600"/>
-              </a:spcAft>
-            </a:pPr>
-            <a:r>
-              <a:rPr sz="1500">
-                <a:solidFill>
-                  <a:srgbClr val="22282E"/>
-                </a:solidFill>
-              </a:rPr>
-              <a:t>•  Diseña la ubicación de una DMZ para un servicio web con backend interno.</a:t>
-            </a:r>
-          </a:p>
-          <a:p>
-            <a:pPr>
-              <a:spcAft>
-                <a:spcPts val="600"/>
-              </a:spcAft>
-            </a:pPr>
-            <a:r>
-              <a:rPr sz="1500">
-                <a:solidFill>
-                  <a:srgbClr val="22282E"/>
-                </a:solidFill>
-              </a:rPr>
-              <a:t>•  Convierte tres flujos de tu matriz en reglas de firewall reales.</a:t>
-            </a:r>
-          </a:p>
-          <a:p>
-            <a:pPr>
-              <a:spcAft>
-                <a:spcPts val="600"/>
-              </a:spcAft>
-            </a:pPr>
-            <a:r>
-              <a:rPr sz="1500">
-                <a:solidFill>
-                  <a:srgbClr val="22282E"/>
-                </a:solidFill>
-              </a:rPr>
-              <a:t>•  Explica la diferencia entre segmentación tradicional (VLAN) y microsegmentación.</a:t>
-            </a:r>
-          </a:p>
-          <a:p>
-            <a:pPr>
-              <a:spcAft>
-                <a:spcPts val="600"/>
-              </a:spcAft>
-            </a:pPr>
-            <a:r>
-              <a:rPr sz="1500">
-                <a:solidFill>
-                  <a:srgbClr val="22282E"/>
-                </a:solidFill>
-              </a:rPr>
-              <a:t>•  Identifica qué señales de contexto usarías para decidir un acceso Zero Trust.</a:t>
-            </a:r>
-          </a:p>
-          <a:p>
-            <a:pPr>
-              <a:spcAft>
-                <a:spcPts val="600"/>
-              </a:spcAft>
-            </a:pPr>
-            <a:r>
-              <a:rPr sz="1500">
-                <a:solidFill>
-                  <a:srgbClr val="22282E"/>
-                </a:solidFill>
-              </a:rPr>
-              <a:t>•  Señala una brecha de tu diseño frente a NIST SP 800-207 y propón cómo cerrarla.</a:t>
+              <a:t>•  Herramienta de diagramado (draw.io, Excalidraw) para modelar la arquitectura.</a:t>
+            </a:r>
+          </a:p>
+          <a:p>
+            <a:pPr>
+              <a:spcAft>
+                <a:spcPts val="600"/>
+              </a:spcAft>
+            </a:pPr>
+            <a:r>
+              <a:rPr sz="1500">
+                <a:solidFill>
+                  <a:srgbClr val="22282E"/>
+                </a:solidFill>
+              </a:rPr>
+              <a:t>•  Laboratorio de red (GNS3/EVE-NG o VMs con múltiples redes) para implementar VLANs y ACLs.</a:t>
+            </a:r>
+          </a:p>
+          <a:p>
+            <a:pPr>
+              <a:spcAft>
+                <a:spcPts val="600"/>
+              </a:spcAft>
+            </a:pPr>
+            <a:r>
+              <a:rPr sz="1500">
+                <a:solidFill>
+                  <a:srgbClr val="22282E"/>
+                </a:solidFill>
+              </a:rPr>
+              <a:t>•  Firewalls de host (nftables, clase 034) para simular microsegmentación.</a:t>
+            </a:r>
+          </a:p>
+          <a:p>
+            <a:pPr>
+              <a:spcAft>
+                <a:spcPts val="600"/>
+              </a:spcAft>
+            </a:pPr>
+            <a:r>
+              <a:rPr sz="1500">
+                <a:solidFill>
+                  <a:srgbClr val="22282E"/>
+                </a:solidFill>
+              </a:rPr>
+              <a:t>•  Documento NIST SP 800-207 como referencia.</a:t>
             </a:r>
           </a:p>
         </p:txBody>
@@ -4748,7 +5109,7 @@
                   <a:srgbClr val="0B3D2E"/>
                 </a:solidFill>
               </a:rPr>
-              <a:t>📝 Reto verificable</a:t>
+              <a:t>🧪 Laboratorio guiado (ejercicio de diseño aplicado)</a:t>
             </a:r>
           </a:p>
         </p:txBody>
@@ -4786,22 +5147,97 @@
                   <a:srgbClr val="22282E"/>
                 </a:solidFill>
               </a:rPr>
-              <a:t>•  Diseña la arquitectura de red segmentada de una organización pequeña (al menos 5 zonas) con: diagrama, matriz de flujos permitidos de mínimo privilegio, y un mapeo explícito de dónde se aplican los principios Zero Trust (verificación de identidad, dispositivo, cifrado, monitoreo). Entrega el diagrama y la matriz, con al menos tres reglas traducidas a configuración de firewall real.</a:t>
-            </a:r>
-          </a:p>
-          <a:p>
-            <a:pPr>
-              <a:spcAft>
-                <a:spcPts val="600"/>
-              </a:spcAft>
-            </a:pPr>
-            <a:r>
-              <a:rPr sz="1500">
-                <a:solidFill>
-                  <a:srgbClr val="22282E"/>
-                </a:solidFill>
-              </a:rPr>
-              <a:t>•  Criterio de aceptación: la matriz no contiene flujos innecesarios (mínimo privilegio verificable), el acceso a la zona de datos y de administración está estrictamente controlado, y el diseño aborda al menos cinco de los siete principios de NIST SP 800-207.</a:t>
+              <a:t>•  Inventaria activos de una organización ficticia: servidores web, base de datos, estaciones de trabajo, servidores de gestión, IoT/impresoras, servicios expuestos.</a:t>
+            </a:r>
+          </a:p>
+          <a:p>
+            <a:pPr>
+              <a:spcAft>
+                <a:spcPts val="600"/>
+              </a:spcAft>
+            </a:pPr>
+            <a:r>
+              <a:rPr sz="1500">
+                <a:solidFill>
+                  <a:srgbClr val="22282E"/>
+                </a:solidFill>
+              </a:rPr>
+              <a:t>•  Clasifica por sensibilidad y agrupa en zonas: DMZ (web), zona de aplicaciones, zona de datos, zona de administración, zona de usuarios, zona de dispositivos no confiables.</a:t>
+            </a:r>
+          </a:p>
+          <a:p>
+            <a:pPr>
+              <a:spcAft>
+                <a:spcPts val="600"/>
+              </a:spcAft>
+            </a:pPr>
+            <a:r>
+              <a:rPr sz="1500">
+                <a:solidFill>
+                  <a:srgbClr val="22282E"/>
+                </a:solidFill>
+              </a:rPr>
+              <a:t>•  Dibuja el diagrama con las zonas y los puntos de control (firewalls) entre ellas.</a:t>
+            </a:r>
+          </a:p>
+          <a:p>
+            <a:pPr>
+              <a:spcAft>
+                <a:spcPts val="600"/>
+              </a:spcAft>
+            </a:pPr>
+            <a:r>
+              <a:rPr sz="1500">
+                <a:solidFill>
+                  <a:srgbClr val="22282E"/>
+                </a:solidFill>
+              </a:rPr>
+              <a:t>•  Define la matriz de flujos permitidos (tabla origen→destino:puerto), aplicando mínimo privilegio. Ejemplo:</a:t>
+            </a:r>
+          </a:p>
+          <a:p>
+            <a:pPr>
+              <a:spcAft>
+                <a:spcPts val="600"/>
+              </a:spcAft>
+            </a:pPr>
+            <a:r>
+              <a:rPr sz="1500">
+                <a:solidFill>
+                  <a:srgbClr val="22282E"/>
+                </a:solidFill>
+              </a:rPr>
+              <a:t>•  Origen — Destino</a:t>
+            </a:r>
+          </a:p>
+          <a:p>
+            <a:pPr>
+              <a:spcAft>
+                <a:spcPts val="600"/>
+              </a:spcAft>
+            </a:pPr>
+            <a:r>
+              <a:rPr sz="1500">
+                <a:solidFill>
+                  <a:srgbClr val="22282E"/>
+                </a:solidFill>
+              </a:rPr>
+              <a:t>•  Usuarios — Web (DMZ)</a:t>
+            </a:r>
+          </a:p>
+          <a:p>
+            <a:pPr>
+              <a:spcAft>
+                <a:spcPts val="600"/>
+              </a:spcAft>
+            </a:pPr>
+            <a:r>
+              <a:rPr sz="1500">
+                <a:solidFill>
+                  <a:srgbClr val="22282E"/>
+                </a:solidFill>
+              </a:rPr>
+              <a:t>•  Web (DMZ) — App</a:t>
             </a:r>
           </a:p>
         </p:txBody>
